--- a/docs/presentation/SpringAI_VectorDB_UserTracking.pptx
+++ b/docs/presentation/SpringAI_VectorDB_UserTracking.pptx
@@ -19732,7 +19732,7 @@
       </p:sp>
       <p:sp>
         <p:nvSpPr>
-          <p:cNvPr id="9" name="Code panel application.yml"/>
+          <p:cNvPr id="9" name="Code panel application.properties"/>
           <p:cNvSpPr/>
           <p:nvPr/>
         </p:nvSpPr>
@@ -19787,7 +19787,7 @@
                   <a:schemeClr val="accent5"/>
                 </a:solidFill>
               </a:rPr>
-              <a:t>application.yml</a:t>
+              <a:t>application.properties</a:t>
             </a:r>
             <a:endParaRPr lang="en-US" sz="1100" dirty="0"/>
           </a:p>
@@ -19795,7 +19795,7 @@
       </p:sp>
       <p:sp>
         <p:nvSpPr>
-          <p:cNvPr id="11" name="Code application.yml"/>
+          <p:cNvPr id="11" name="Code application.properties"/>
           <p:cNvSpPr txBox="1"/>
           <p:nvPr/>
         </p:nvSpPr>
@@ -19816,222 +19816,122 @@
           <a:p>
             <a:pPr indent="0" marL="0">
               <a:lnSpc>
-                <a:spcPts val="1400"/>
+                <a:spcPts val="1900"/>
               </a:lnSpc>
               <a:buNone/>
             </a:pPr>
             <a:r>
-              <a:rPr lang="en-US" sz="1100" dirty="0">
-                <a:solidFill>
-                  <a:srgbClr val="EFF7F5"/>
-                </a:solidFill>
-                <a:latin typeface="Courier New" pitchFamily="34" charset="0"/>
-                <a:ea typeface="Courier New" pitchFamily="34" charset="-122"/>
-                <a:cs typeface="Courier New" pitchFamily="34" charset="-120"/>
-              </a:rPr>
-              <a:t>spring:</a:t>
-            </a:r>
-            <a:endParaRPr lang="en-US" sz="1100" dirty="0"/>
+              <a:rPr lang="en-US" sz="950" dirty="0">
+                <a:solidFill>
+                  <a:srgbClr val="EFF7F5"/>
+                </a:solidFill>
+                <a:latin typeface="Courier New" pitchFamily="34" charset="0"/>
+                <a:ea typeface="Courier New" pitchFamily="34" charset="-122"/>
+                <a:cs typeface="Courier New" pitchFamily="34" charset="-120"/>
+              </a:rPr>
+              <a:t>spring.ai.openai.api-key=${GEMINI_API_KEY:}</a:t>
+            </a:r>
+            <a:endParaRPr lang="en-US" sz="950" dirty="0"/>
           </a:p>
           <a:p>
             <a:pPr indent="0" marL="0">
               <a:lnSpc>
-                <a:spcPts val="1400"/>
+                <a:spcPts val="1900"/>
               </a:lnSpc>
               <a:buNone/>
             </a:pPr>
             <a:r>
-              <a:rPr lang="en-US" sz="1100" dirty="0">
-                <a:solidFill>
-                  <a:srgbClr val="EFF7F5"/>
-                </a:solidFill>
-                <a:latin typeface="Courier New" pitchFamily="34" charset="0"/>
-                <a:ea typeface="Courier New" pitchFamily="34" charset="-122"/>
-                <a:cs typeface="Courier New" pitchFamily="34" charset="-120"/>
-              </a:rPr>
-              <a:t>  ai:</a:t>
-            </a:r>
-            <a:endParaRPr lang="en-US" sz="1100" dirty="0"/>
+              <a:rPr lang="en-US" sz="950" dirty="0">
+                <a:solidFill>
+                  <a:srgbClr val="EFF7F5"/>
+                </a:solidFill>
+                <a:latin typeface="Courier New" pitchFamily="34" charset="0"/>
+                <a:ea typeface="Courier New" pitchFamily="34" charset="-122"/>
+                <a:cs typeface="Courier New" pitchFamily="34" charset="-120"/>
+              </a:rPr>
+              <a:t>spring.ai.openai.base-url=https://generativelanguage.googleapis.com</a:t>
+            </a:r>
+            <a:endParaRPr lang="en-US" sz="950" dirty="0"/>
           </a:p>
           <a:p>
             <a:pPr indent="0" marL="0">
               <a:lnSpc>
-                <a:spcPts val="1400"/>
+                <a:spcPts val="1900"/>
               </a:lnSpc>
               <a:buNone/>
             </a:pPr>
             <a:r>
-              <a:rPr lang="en-US" sz="1100" dirty="0">
-                <a:solidFill>
-                  <a:srgbClr val="EFF7F5"/>
-                </a:solidFill>
-                <a:latin typeface="Courier New" pitchFamily="34" charset="0"/>
-                <a:ea typeface="Courier New" pitchFamily="34" charset="-122"/>
-                <a:cs typeface="Courier New" pitchFamily="34" charset="-120"/>
-              </a:rPr>
-              <a:t>    openai:</a:t>
-            </a:r>
-            <a:endParaRPr lang="en-US" sz="1100" dirty="0"/>
+              <a:rPr lang="en-US" sz="950" dirty="0">
+                <a:solidFill>
+                  <a:srgbClr val="EFF7F5"/>
+                </a:solidFill>
+                <a:latin typeface="Courier New" pitchFamily="34" charset="0"/>
+                <a:ea typeface="Courier New" pitchFamily="34" charset="-122"/>
+                <a:cs typeface="Courier New" pitchFamily="34" charset="-120"/>
+              </a:rPr>
+              <a:t>spring.ai.openai.chat.completions-path=/v1beta/openai/chat/completions</a:t>
+            </a:r>
+            <a:endParaRPr lang="en-US" sz="950" dirty="0"/>
           </a:p>
           <a:p>
             <a:pPr indent="0" marL="0">
               <a:lnSpc>
-                <a:spcPts val="1400"/>
+                <a:spcPts val="1900"/>
               </a:lnSpc>
               <a:buNone/>
             </a:pPr>
             <a:r>
-              <a:rPr lang="en-US" sz="1100" dirty="0">
-                <a:solidFill>
-                  <a:srgbClr val="EFF7F5"/>
-                </a:solidFill>
-                <a:latin typeface="Courier New" pitchFamily="34" charset="0"/>
-                <a:ea typeface="Courier New" pitchFamily="34" charset="-122"/>
-                <a:cs typeface="Courier New" pitchFamily="34" charset="-120"/>
-              </a:rPr>
-              <a:t>      api-key: ${GEMINI_API_KEY:}</a:t>
-            </a:r>
-            <a:endParaRPr lang="en-US" sz="1100" dirty="0"/>
+              <a:rPr lang="en-US" sz="950" dirty="0">
+                <a:solidFill>
+                  <a:srgbClr val="EFF7F5"/>
+                </a:solidFill>
+                <a:latin typeface="Courier New" pitchFamily="34" charset="0"/>
+                <a:ea typeface="Courier New" pitchFamily="34" charset="-122"/>
+                <a:cs typeface="Courier New" pitchFamily="34" charset="-120"/>
+              </a:rPr>
+              <a:t>spring.ai.openai.chat.options.model=gemini-2.5-flash</a:t>
+            </a:r>
+            <a:endParaRPr lang="en-US" sz="950" dirty="0"/>
           </a:p>
           <a:p>
             <a:pPr indent="0" marL="0">
               <a:lnSpc>
-                <a:spcPts val="1400"/>
+                <a:spcPts val="1900"/>
               </a:lnSpc>
               <a:buNone/>
             </a:pPr>
             <a:r>
-              <a:rPr lang="en-US" sz="1100" dirty="0">
-                <a:solidFill>
-                  <a:srgbClr val="EFF7F5"/>
-                </a:solidFill>
-                <a:latin typeface="Courier New" pitchFamily="34" charset="0"/>
-                <a:ea typeface="Courier New" pitchFamily="34" charset="-122"/>
-                <a:cs typeface="Courier New" pitchFamily="34" charset="-120"/>
-              </a:rPr>
-              <a:t>      base-url: https://generativelanguage.googleapis.com</a:t>
-            </a:r>
-            <a:endParaRPr lang="en-US" sz="1100" dirty="0"/>
+              <a:rPr lang="en-US" sz="950" dirty="0">
+                <a:solidFill>
+                  <a:srgbClr val="EFF7F5"/>
+                </a:solidFill>
+                <a:latin typeface="Courier New" pitchFamily="34" charset="0"/>
+                <a:ea typeface="Courier New" pitchFamily="34" charset="-122"/>
+                <a:cs typeface="Courier New" pitchFamily="34" charset="-120"/>
+              </a:rPr>
+              <a:t>spring.ai.openai.embedding.embeddings-path=/v1beta/openai/embeddings</a:t>
+            </a:r>
+            <a:endParaRPr lang="en-US" sz="950" dirty="0"/>
           </a:p>
           <a:p>
             <a:pPr indent="0" marL="0">
               <a:lnSpc>
-                <a:spcPts val="1400"/>
+                <a:spcPts val="1900"/>
               </a:lnSpc>
               <a:buNone/>
             </a:pPr>
             <a:r>
-              <a:rPr lang="en-US" sz="1100" dirty="0">
-                <a:solidFill>
-                  <a:srgbClr val="EFF7F5"/>
-                </a:solidFill>
-                <a:latin typeface="Courier New" pitchFamily="34" charset="0"/>
-                <a:ea typeface="Courier New" pitchFamily="34" charset="-122"/>
-                <a:cs typeface="Courier New" pitchFamily="34" charset="-120"/>
-              </a:rPr>
-              <a:t>      chat:</a:t>
-            </a:r>
-            <a:endParaRPr lang="en-US" sz="1100" dirty="0"/>
-          </a:p>
-          <a:p>
-            <a:pPr indent="0" marL="0">
-              <a:lnSpc>
-                <a:spcPts val="1400"/>
-              </a:lnSpc>
-              <a:buNone/>
-            </a:pPr>
-            <a:r>
-              <a:rPr lang="en-US" sz="1100" dirty="0">
-                <a:solidFill>
-                  <a:srgbClr val="EFF7F5"/>
-                </a:solidFill>
-                <a:latin typeface="Courier New" pitchFamily="34" charset="0"/>
-                <a:ea typeface="Courier New" pitchFamily="34" charset="-122"/>
-                <a:cs typeface="Courier New" pitchFamily="34" charset="-120"/>
-              </a:rPr>
-              <a:t>        completions-path: /v1beta/openai/chat/completions</a:t>
-            </a:r>
-            <a:endParaRPr lang="en-US" sz="1100" dirty="0"/>
-          </a:p>
-          <a:p>
-            <a:pPr indent="0" marL="0">
-              <a:lnSpc>
-                <a:spcPts val="1400"/>
-              </a:lnSpc>
-              <a:buNone/>
-            </a:pPr>
-            <a:r>
-              <a:rPr lang="en-US" sz="1100" dirty="0">
-                <a:solidFill>
-                  <a:srgbClr val="EFF7F5"/>
-                </a:solidFill>
-                <a:latin typeface="Courier New" pitchFamily="34" charset="0"/>
-                <a:ea typeface="Courier New" pitchFamily="34" charset="-122"/>
-                <a:cs typeface="Courier New" pitchFamily="34" charset="-120"/>
-              </a:rPr>
-              <a:t>        options.model: gemini-2.5-flash</a:t>
-            </a:r>
-            <a:endParaRPr lang="en-US" sz="1100" dirty="0"/>
-          </a:p>
-          <a:p>
-            <a:pPr indent="0" marL="0">
-              <a:lnSpc>
-                <a:spcPts val="1400"/>
-              </a:lnSpc>
-              <a:buNone/>
-            </a:pPr>
-            <a:r>
-              <a:rPr lang="en-US" sz="1100" dirty="0">
-                <a:solidFill>
-                  <a:srgbClr val="EFF7F5"/>
-                </a:solidFill>
-                <a:latin typeface="Courier New" pitchFamily="34" charset="0"/>
-                <a:ea typeface="Courier New" pitchFamily="34" charset="-122"/>
-                <a:cs typeface="Courier New" pitchFamily="34" charset="-120"/>
-              </a:rPr>
-              <a:t>      embedding:</a:t>
-            </a:r>
-            <a:endParaRPr lang="en-US" sz="1100" dirty="0"/>
-          </a:p>
-          <a:p>
-            <a:pPr indent="0" marL="0">
-              <a:lnSpc>
-                <a:spcPts val="1400"/>
-              </a:lnSpc>
-              <a:buNone/>
-            </a:pPr>
-            <a:r>
-              <a:rPr lang="en-US" sz="1100" dirty="0">
-                <a:solidFill>
-                  <a:srgbClr val="EFF7F5"/>
-                </a:solidFill>
-                <a:latin typeface="Courier New" pitchFamily="34" charset="0"/>
-                <a:ea typeface="Courier New" pitchFamily="34" charset="-122"/>
-                <a:cs typeface="Courier New" pitchFamily="34" charset="-120"/>
-              </a:rPr>
-              <a:t>        embeddings-path: /v1beta/openai/embeddings</a:t>
-            </a:r>
-            <a:endParaRPr lang="en-US" sz="1100" dirty="0"/>
-          </a:p>
-          <a:p>
-            <a:pPr indent="0" marL="0">
-              <a:lnSpc>
-                <a:spcPts val="1400"/>
-              </a:lnSpc>
-              <a:buNone/>
-            </a:pPr>
-            <a:r>
-              <a:rPr lang="en-US" sz="1100" dirty="0">
-                <a:solidFill>
-                  <a:srgbClr val="EFF7F5"/>
-                </a:solidFill>
-                <a:latin typeface="Courier New" pitchFamily="34" charset="0"/>
-                <a:ea typeface="Courier New" pitchFamily="34" charset="-122"/>
-                <a:cs typeface="Courier New" pitchFamily="34" charset="-120"/>
-              </a:rPr>
-              <a:t>        options.model: gemini-embedding-001</a:t>
-            </a:r>
-            <a:endParaRPr lang="en-US" sz="1100" dirty="0"/>
+              <a:rPr lang="en-US" sz="950" dirty="0">
+                <a:solidFill>
+                  <a:srgbClr val="EFF7F5"/>
+                </a:solidFill>
+                <a:latin typeface="Courier New" pitchFamily="34" charset="0"/>
+                <a:ea typeface="Courier New" pitchFamily="34" charset="-122"/>
+                <a:cs typeface="Courier New" pitchFamily="34" charset="-120"/>
+              </a:rPr>
+              <a:t>spring.ai.openai.embedding.options.model=gemini-embedding-001</a:t>
+            </a:r>
+            <a:endParaRPr lang="en-US" sz="950" dirty="0"/>
           </a:p>
         </p:txBody>
       </p:sp>

--- a/docs/presentation/SpringAI_VectorDB_UserTracking.pptx
+++ b/docs/presentation/SpringAI_VectorDB_UserTracking.pptx
@@ -18495,7 +18495,7 @@
                   <a:schemeClr val="bg1"/>
                 </a:solidFill>
               </a:rPr>
-              <a:t>Một starter: </a:t>
+              <a:t>Hai starter: </a:t>
             </a:r>
             <a:r>
               <a:rPr lang="en-US" sz="1550" dirty="0">
@@ -18503,7 +18503,7 @@
                   <a:schemeClr val="bg1"/>
                 </a:solidFill>
               </a:rPr>
-              <a:t>OpenAI + base-url, đổi sang OpenAI/Ollama bằng biến môi trường</a:t>
+              <a:t>Google GenAI cho chat (giữ thought signature), OpenAI + base-url cho embedding; chat đổi sang OpenAI/Ollama bằng biến môi trường</a:t>
             </a:r>
             <a:endParaRPr lang="en-US" sz="1550" dirty="0"/>
           </a:p>
@@ -19138,6 +19138,27 @@
                           <a:ea typeface="Courier New" pitchFamily="34" charset="-122"/>
                           <a:cs typeface="Courier New" pitchFamily="34" charset="-120"/>
                         </a:rPr>
+                        <a:t>spring-ai-starter-model-google-genai</a:t>
+                      </a:r>
+                      <a:endParaRPr lang="en-US" sz="1100" dirty="0">
+                        <a:latin typeface="Courier New" charset="0"/>
+                        <a:ea typeface="Courier New" charset="0"/>
+                        <a:cs typeface="Courier New" charset="0"/>
+                      </a:endParaRPr>
+                    </a:p>
+                    <a:p>
+                      <a:pPr indent="0" marL="0">
+                        <a:buNone/>
+                      </a:pPr>
+                      <a:r>
+                        <a:rPr lang="en-US" sz="1100" dirty="0">
+                          <a:solidFill>
+                            <a:srgbClr val="14201E"/>
+                          </a:solidFill>
+                          <a:latin typeface="Courier New" pitchFamily="34" charset="0"/>
+                          <a:ea typeface="Courier New" pitchFamily="34" charset="-122"/>
+                          <a:cs typeface="Courier New" pitchFamily="34" charset="-120"/>
+                        </a:rPr>
                         <a:t>spring-ai-starter-model-openai</a:t>
                       </a:r>
                       <a:endParaRPr lang="en-US" sz="1100" dirty="0">
@@ -19203,7 +19224,21 @@
                             <a:srgbClr val="14201E"/>
                           </a:solidFill>
                         </a:rPr>
-                        <a:t>Chat + embedding (trỏ tới Gemini)</a:t>
+                        <a:t>Chat (SDK Gemini gốc)</a:t>
+                      </a:r>
+                      <a:endParaRPr lang="en-US" sz="1200" dirty="0"/>
+                    </a:p>
+                    <a:p>
+                      <a:pPr indent="0" marL="0">
+                        <a:buNone/>
+                      </a:pPr>
+                      <a:r>
+                        <a:rPr lang="en-US" sz="1200" dirty="0">
+                          <a:solidFill>
+                            <a:srgbClr val="14201E"/>
+                          </a:solidFill>
+                        </a:rPr>
+                        <a:t>Embedding (trỏ tới Gemini)</a:t>
                       </a:r>
                       <a:endParaRPr lang="en-US" sz="1200" dirty="0"/>
                     </a:p>
@@ -19829,7 +19864,7 @@
                 <a:ea typeface="Courier New" pitchFamily="34" charset="-122"/>
                 <a:cs typeface="Courier New" pitchFamily="34" charset="-120"/>
               </a:rPr>
-              <a:t>spring.ai.openai.api-key=${GEMINI_API_KEY:}</a:t>
+              <a:t>spring.ai.model.chat=google-genai</a:t>
             </a:r>
             <a:endParaRPr lang="en-US" sz="950" dirty="0"/>
           </a:p>
@@ -19849,7 +19884,7 @@
                 <a:ea typeface="Courier New" pitchFamily="34" charset="-122"/>
                 <a:cs typeface="Courier New" pitchFamily="34" charset="-120"/>
               </a:rPr>
-              <a:t>spring.ai.openai.base-url=https://generativelanguage.googleapis.com</a:t>
+              <a:t>spring.ai.google.genai.api-key=${GEMINI_API_KEY:}</a:t>
             </a:r>
             <a:endParaRPr lang="en-US" sz="950" dirty="0"/>
           </a:p>
@@ -19869,7 +19904,7 @@
                 <a:ea typeface="Courier New" pitchFamily="34" charset="-122"/>
                 <a:cs typeface="Courier New" pitchFamily="34" charset="-120"/>
               </a:rPr>
-              <a:t>spring.ai.openai.chat.completions-path=/v1beta/openai/chat/completions</a:t>
+              <a:t>spring.ai.google.genai.chat.options.model=gemini-2.5-flash</a:t>
             </a:r>
             <a:endParaRPr lang="en-US" sz="950" dirty="0"/>
           </a:p>
@@ -19889,7 +19924,27 @@
                 <a:ea typeface="Courier New" pitchFamily="34" charset="-122"/>
                 <a:cs typeface="Courier New" pitchFamily="34" charset="-120"/>
               </a:rPr>
-              <a:t>spring.ai.openai.chat.options.model=gemini-2.5-flash</a:t>
+              <a:t>spring.ai.openai.api-key=${GEMINI_API_KEY:}</a:t>
+            </a:r>
+            <a:endParaRPr lang="en-US" sz="950" dirty="0"/>
+          </a:p>
+          <a:p>
+            <a:pPr indent="0" marL="0">
+              <a:lnSpc>
+                <a:spcPts val="1900"/>
+              </a:lnSpc>
+              <a:buNone/>
+            </a:pPr>
+            <a:r>
+              <a:rPr lang="en-US" sz="950" dirty="0">
+                <a:solidFill>
+                  <a:srgbClr val="EFF7F5"/>
+                </a:solidFill>
+                <a:latin typeface="Courier New" pitchFamily="34" charset="0"/>
+                <a:ea typeface="Courier New" pitchFamily="34" charset="-122"/>
+                <a:cs typeface="Courier New" pitchFamily="34" charset="-120"/>
+              </a:rPr>
+              <a:t>spring.ai.openai.base-url=https://generativelanguage.googleapis.com</a:t>
             </a:r>
             <a:endParaRPr lang="en-US" sz="950" dirty="0"/>
           </a:p>
@@ -19992,7 +20047,7 @@
                   <a:schemeClr val="tx1"/>
                 </a:solidFill>
               </a:rPr>
-              <a:t>Bản rút gọn: file thật đọc từ biến môi trường (AI_BASE_URL, AI_CHAT_MODEL...). Đổi sang OpenAI hoặc Ollama chỉ cần đổi địa chỉ, hai đường dẫn và tên mô hình. Khoá rỗng → AI tắt.</a:t>
+              <a:t>Bản rút gọn: file thật đọc từ biến môi trường (AI_BASE_URL, AI_CHAT_MODEL...). Chat qua SDK Gemini để giữ thought signature của Gemini 3; chat bằng OpenAI/Ollama thì thêm AI_CHAT_PROVIDER=openai. Khoá rỗng → AI tắt.</a:t>
             </a:r>
             <a:endParaRPr lang="en-US" sz="1400" dirty="0"/>
           </a:p>
@@ -43677,7 +43732,7 @@
                   <a:schemeClr val="bg1"/>
                 </a:solidFill>
               </a:rPr>
-              <a:t>Kiểm thử tự động: 73 test, chạy cả app trên H2 + máy chủ OpenAI giả</a:t>
+              <a:t>Kiểm thử tự động: 86 test, chạy cả app trên H2 + máy chủ Gemini giả</a:t>
             </a:r>
             <a:endParaRPr lang="en-US" sz="1600" dirty="0"/>
           </a:p>
